--- a/assets/overview.pptx
+++ b/assets/overview.pptx
@@ -252,7 +252,7 @@
           <a:p>
             <a:fld id="{D997B5FA-0921-464F-AAE1-844C04324D75}" type="datetimeFigureOut">
               <a:rPr lang="zh-CN" altLang="en-US" smtClean="0"/>
-              <a:t>2026/6/18</a:t>
+              <a:t>2026/6/24</a:t>
             </a:fld>
             <a:endParaRPr lang="zh-CN" altLang="en-US"/>
           </a:p>
@@ -420,7 +420,7 @@
           <a:p>
             <a:fld id="{D997B5FA-0921-464F-AAE1-844C04324D75}" type="datetimeFigureOut">
               <a:rPr lang="zh-CN" altLang="en-US" smtClean="0"/>
-              <a:t>2026/6/18</a:t>
+              <a:t>2026/6/24</a:t>
             </a:fld>
             <a:endParaRPr lang="zh-CN" altLang="en-US"/>
           </a:p>
@@ -598,7 +598,7 @@
           <a:p>
             <a:fld id="{D997B5FA-0921-464F-AAE1-844C04324D75}" type="datetimeFigureOut">
               <a:rPr lang="zh-CN" altLang="en-US" smtClean="0"/>
-              <a:t>2026/6/18</a:t>
+              <a:t>2026/6/24</a:t>
             </a:fld>
             <a:endParaRPr lang="zh-CN" altLang="en-US"/>
           </a:p>
@@ -766,7 +766,7 @@
           <a:p>
             <a:fld id="{D997B5FA-0921-464F-AAE1-844C04324D75}" type="datetimeFigureOut">
               <a:rPr lang="zh-CN" altLang="en-US" smtClean="0"/>
-              <a:t>2026/6/18</a:t>
+              <a:t>2026/6/24</a:t>
             </a:fld>
             <a:endParaRPr lang="zh-CN" altLang="en-US"/>
           </a:p>
@@ -1011,7 +1011,7 @@
           <a:p>
             <a:fld id="{D997B5FA-0921-464F-AAE1-844C04324D75}" type="datetimeFigureOut">
               <a:rPr lang="zh-CN" altLang="en-US" smtClean="0"/>
-              <a:t>2026/6/18</a:t>
+              <a:t>2026/6/24</a:t>
             </a:fld>
             <a:endParaRPr lang="zh-CN" altLang="en-US"/>
           </a:p>
@@ -1240,7 +1240,7 @@
           <a:p>
             <a:fld id="{D997B5FA-0921-464F-AAE1-844C04324D75}" type="datetimeFigureOut">
               <a:rPr lang="zh-CN" altLang="en-US" smtClean="0"/>
-              <a:t>2026/6/18</a:t>
+              <a:t>2026/6/24</a:t>
             </a:fld>
             <a:endParaRPr lang="zh-CN" altLang="en-US"/>
           </a:p>
@@ -1604,7 +1604,7 @@
           <a:p>
             <a:fld id="{D997B5FA-0921-464F-AAE1-844C04324D75}" type="datetimeFigureOut">
               <a:rPr lang="zh-CN" altLang="en-US" smtClean="0"/>
-              <a:t>2026/6/18</a:t>
+              <a:t>2026/6/24</a:t>
             </a:fld>
             <a:endParaRPr lang="zh-CN" altLang="en-US"/>
           </a:p>
@@ -1721,7 +1721,7 @@
           <a:p>
             <a:fld id="{D997B5FA-0921-464F-AAE1-844C04324D75}" type="datetimeFigureOut">
               <a:rPr lang="zh-CN" altLang="en-US" smtClean="0"/>
-              <a:t>2026/6/18</a:t>
+              <a:t>2026/6/24</a:t>
             </a:fld>
             <a:endParaRPr lang="zh-CN" altLang="en-US"/>
           </a:p>
@@ -1816,7 +1816,7 @@
           <a:p>
             <a:fld id="{D997B5FA-0921-464F-AAE1-844C04324D75}" type="datetimeFigureOut">
               <a:rPr lang="zh-CN" altLang="en-US" smtClean="0"/>
-              <a:t>2026/6/18</a:t>
+              <a:t>2026/6/24</a:t>
             </a:fld>
             <a:endParaRPr lang="zh-CN" altLang="en-US"/>
           </a:p>
@@ -2091,7 +2091,7 @@
           <a:p>
             <a:fld id="{D997B5FA-0921-464F-AAE1-844C04324D75}" type="datetimeFigureOut">
               <a:rPr lang="zh-CN" altLang="en-US" smtClean="0"/>
-              <a:t>2026/6/18</a:t>
+              <a:t>2026/6/24</a:t>
             </a:fld>
             <a:endParaRPr lang="zh-CN" altLang="en-US"/>
           </a:p>
@@ -2346,7 +2346,7 @@
           <a:p>
             <a:fld id="{D997B5FA-0921-464F-AAE1-844C04324D75}" type="datetimeFigureOut">
               <a:rPr lang="zh-CN" altLang="en-US" smtClean="0"/>
-              <a:t>2026/6/18</a:t>
+              <a:t>2026/6/24</a:t>
             </a:fld>
             <a:endParaRPr lang="zh-CN" altLang="en-US"/>
           </a:p>
@@ -2557,7 +2557,7 @@
           <a:p>
             <a:fld id="{D997B5FA-0921-464F-AAE1-844C04324D75}" type="datetimeFigureOut">
               <a:rPr lang="zh-CN" altLang="en-US" smtClean="0"/>
-              <a:t>2026/6/18</a:t>
+              <a:t>2026/6/24</a:t>
             </a:fld>
             <a:endParaRPr lang="zh-CN" altLang="en-US"/>
           </a:p>
@@ -4404,109 +4404,13 @@
       </p:pic>
       <p:sp>
         <p:nvSpPr>
-          <p:cNvPr id="145" name="箭头: 右 144"/>
-          <p:cNvSpPr/>
-          <p:nvPr/>
-        </p:nvSpPr>
-        <p:spPr>
-          <a:xfrm>
-            <a:off x="6425440" y="2513042"/>
-            <a:ext cx="863107" cy="119004"/>
-          </a:xfrm>
-          <a:prstGeom prst="rightArrow">
-            <a:avLst/>
-          </a:prstGeom>
-          <a:solidFill>
-            <a:srgbClr val="E6D5F3"/>
-          </a:solidFill>
-          <a:ln>
-            <a:solidFill>
-              <a:srgbClr val="7030A0"/>
-            </a:solidFill>
-          </a:ln>
-        </p:spPr>
-        <p:style>
-          <a:lnRef idx="2">
-            <a:schemeClr val="accent3">
-              <a:shade val="15000"/>
-            </a:schemeClr>
-          </a:lnRef>
-          <a:fillRef idx="1">
-            <a:schemeClr val="accent3"/>
-          </a:fillRef>
-          <a:effectRef idx="0">
-            <a:schemeClr val="accent3"/>
-          </a:effectRef>
-          <a:fontRef idx="minor">
-            <a:schemeClr val="lt1"/>
-          </a:fontRef>
-        </p:style>
-        <p:txBody>
-          <a:bodyPr rtlCol="0" anchor="ctr"/>
-          <a:lstStyle/>
-          <a:p>
-            <a:pPr algn="ctr"/>
-            <a:endParaRPr lang="zh-CN" altLang="en-US" sz="1072"/>
-          </a:p>
-        </p:txBody>
-      </p:sp>
-      <p:sp>
-        <p:nvSpPr>
-          <p:cNvPr id="146" name="箭头: 右 145"/>
-          <p:cNvSpPr/>
-          <p:nvPr/>
-        </p:nvSpPr>
-        <p:spPr>
-          <a:xfrm rot="10800000">
-            <a:off x="6401063" y="1925001"/>
-            <a:ext cx="878474" cy="125084"/>
-          </a:xfrm>
-          <a:prstGeom prst="rightArrow">
-            <a:avLst/>
-          </a:prstGeom>
-          <a:solidFill>
-            <a:srgbClr val="E6D5F3"/>
-          </a:solidFill>
-          <a:ln>
-            <a:solidFill>
-              <a:srgbClr val="7030A0"/>
-            </a:solidFill>
-          </a:ln>
-        </p:spPr>
-        <p:style>
-          <a:lnRef idx="2">
-            <a:schemeClr val="accent3">
-              <a:shade val="15000"/>
-            </a:schemeClr>
-          </a:lnRef>
-          <a:fillRef idx="1">
-            <a:schemeClr val="accent3"/>
-          </a:fillRef>
-          <a:effectRef idx="0">
-            <a:schemeClr val="accent3"/>
-          </a:effectRef>
-          <a:fontRef idx="minor">
-            <a:schemeClr val="lt1"/>
-          </a:fontRef>
-        </p:style>
-        <p:txBody>
-          <a:bodyPr rtlCol="0" anchor="ctr"/>
-          <a:lstStyle/>
-          <a:p>
-            <a:pPr algn="ctr"/>
-            <a:endParaRPr lang="zh-CN" altLang="en-US" sz="1072"/>
-          </a:p>
-        </p:txBody>
-      </p:sp>
-      <p:sp>
-        <p:nvSpPr>
           <p:cNvPr id="147" name="文本框 146"/>
           <p:cNvSpPr txBox="1"/>
           <p:nvPr/>
         </p:nvSpPr>
         <p:spPr>
           <a:xfrm>
-            <a:off x="6411029" y="1609621"/>
+            <a:off x="6428484" y="1736785"/>
             <a:ext cx="927189" cy="330732"/>
           </a:xfrm>
           <a:prstGeom prst="rect">
@@ -4536,7 +4440,7 @@
         </p:nvSpPr>
         <p:spPr>
           <a:xfrm>
-            <a:off x="6467409" y="2205122"/>
+            <a:off x="6481393" y="2180234"/>
             <a:ext cx="858349" cy="330732"/>
           </a:xfrm>
           <a:prstGeom prst="rect">
@@ -6517,6 +6421,52 @@
             <a:prstDash val="dash"/>
             <a:headEnd type="none" w="med" len="med"/>
             <a:tailEnd type="triangle" w="med" len="med"/>
+          </a:ln>
+        </p:spPr>
+        <p:style>
+          <a:lnRef idx="1">
+            <a:schemeClr val="accent1"/>
+          </a:lnRef>
+          <a:fillRef idx="0">
+            <a:schemeClr val="accent1"/>
+          </a:fillRef>
+          <a:effectRef idx="0">
+            <a:schemeClr val="accent1"/>
+          </a:effectRef>
+          <a:fontRef idx="minor">
+            <a:schemeClr val="tx1"/>
+          </a:fontRef>
+        </p:style>
+      </p:cxnSp>
+      <p:cxnSp>
+        <p:nvCxnSpPr>
+          <p:cNvPr id="3" name="直接箭头连接符 2">
+            <a:extLst>
+              <a:ext uri="{FF2B5EF4-FFF2-40B4-BE49-F238E27FC236}">
+                <a16:creationId xmlns:a16="http://schemas.microsoft.com/office/drawing/2014/main" id="{923C7FFA-2109-FF83-4BB9-AD8A48642270}"/>
+              </a:ext>
+            </a:extLst>
+          </p:cNvPr>
+          <p:cNvCxnSpPr>
+            <a:cxnSpLocks/>
+          </p:cNvCxnSpPr>
+          <p:nvPr/>
+        </p:nvCxnSpPr>
+        <p:spPr>
+          <a:xfrm flipH="1">
+            <a:off x="6451342" y="2130205"/>
+            <a:ext cx="849339" cy="0"/>
+          </a:xfrm>
+          <a:prstGeom prst="straightConnector1">
+            <a:avLst/>
+          </a:prstGeom>
+          <a:ln w="38100">
+            <a:solidFill>
+              <a:srgbClr val="7030A0"/>
+            </a:solidFill>
+            <a:prstDash val="dash"/>
+            <a:headEnd type="triangle"/>
+            <a:tailEnd type="triangle"/>
           </a:ln>
         </p:spPr>
         <p:style>

--- a/assets/overview.pptx
+++ b/assets/overview.pptx
@@ -252,7 +252,7 @@
           <a:p>
             <a:fld id="{D997B5FA-0921-464F-AAE1-844C04324D75}" type="datetimeFigureOut">
               <a:rPr lang="zh-CN" altLang="en-US" smtClean="0"/>
-              <a:t>2026/6/24</a:t>
+              <a:t>2026/6/30</a:t>
             </a:fld>
             <a:endParaRPr lang="zh-CN" altLang="en-US"/>
           </a:p>
@@ -420,7 +420,7 @@
           <a:p>
             <a:fld id="{D997B5FA-0921-464F-AAE1-844C04324D75}" type="datetimeFigureOut">
               <a:rPr lang="zh-CN" altLang="en-US" smtClean="0"/>
-              <a:t>2026/6/24</a:t>
+              <a:t>2026/6/30</a:t>
             </a:fld>
             <a:endParaRPr lang="zh-CN" altLang="en-US"/>
           </a:p>
@@ -598,7 +598,7 @@
           <a:p>
             <a:fld id="{D997B5FA-0921-464F-AAE1-844C04324D75}" type="datetimeFigureOut">
               <a:rPr lang="zh-CN" altLang="en-US" smtClean="0"/>
-              <a:t>2026/6/24</a:t>
+              <a:t>2026/6/30</a:t>
             </a:fld>
             <a:endParaRPr lang="zh-CN" altLang="en-US"/>
           </a:p>
@@ -766,7 +766,7 @@
           <a:p>
             <a:fld id="{D997B5FA-0921-464F-AAE1-844C04324D75}" type="datetimeFigureOut">
               <a:rPr lang="zh-CN" altLang="en-US" smtClean="0"/>
-              <a:t>2026/6/24</a:t>
+              <a:t>2026/6/30</a:t>
             </a:fld>
             <a:endParaRPr lang="zh-CN" altLang="en-US"/>
           </a:p>
@@ -1011,7 +1011,7 @@
           <a:p>
             <a:fld id="{D997B5FA-0921-464F-AAE1-844C04324D75}" type="datetimeFigureOut">
               <a:rPr lang="zh-CN" altLang="en-US" smtClean="0"/>
-              <a:t>2026/6/24</a:t>
+              <a:t>2026/6/30</a:t>
             </a:fld>
             <a:endParaRPr lang="zh-CN" altLang="en-US"/>
           </a:p>
@@ -1240,7 +1240,7 @@
           <a:p>
             <a:fld id="{D997B5FA-0921-464F-AAE1-844C04324D75}" type="datetimeFigureOut">
               <a:rPr lang="zh-CN" altLang="en-US" smtClean="0"/>
-              <a:t>2026/6/24</a:t>
+              <a:t>2026/6/30</a:t>
             </a:fld>
             <a:endParaRPr lang="zh-CN" altLang="en-US"/>
           </a:p>
@@ -1604,7 +1604,7 @@
           <a:p>
             <a:fld id="{D997B5FA-0921-464F-AAE1-844C04324D75}" type="datetimeFigureOut">
               <a:rPr lang="zh-CN" altLang="en-US" smtClean="0"/>
-              <a:t>2026/6/24</a:t>
+              <a:t>2026/6/30</a:t>
             </a:fld>
             <a:endParaRPr lang="zh-CN" altLang="en-US"/>
           </a:p>
@@ -1721,7 +1721,7 @@
           <a:p>
             <a:fld id="{D997B5FA-0921-464F-AAE1-844C04324D75}" type="datetimeFigureOut">
               <a:rPr lang="zh-CN" altLang="en-US" smtClean="0"/>
-              <a:t>2026/6/24</a:t>
+              <a:t>2026/6/30</a:t>
             </a:fld>
             <a:endParaRPr lang="zh-CN" altLang="en-US"/>
           </a:p>
@@ -1816,7 +1816,7 @@
           <a:p>
             <a:fld id="{D997B5FA-0921-464F-AAE1-844C04324D75}" type="datetimeFigureOut">
               <a:rPr lang="zh-CN" altLang="en-US" smtClean="0"/>
-              <a:t>2026/6/24</a:t>
+              <a:t>2026/6/30</a:t>
             </a:fld>
             <a:endParaRPr lang="zh-CN" altLang="en-US"/>
           </a:p>
@@ -2091,7 +2091,7 @@
           <a:p>
             <a:fld id="{D997B5FA-0921-464F-AAE1-844C04324D75}" type="datetimeFigureOut">
               <a:rPr lang="zh-CN" altLang="en-US" smtClean="0"/>
-              <a:t>2026/6/24</a:t>
+              <a:t>2026/6/30</a:t>
             </a:fld>
             <a:endParaRPr lang="zh-CN" altLang="en-US"/>
           </a:p>
@@ -2346,7 +2346,7 @@
           <a:p>
             <a:fld id="{D997B5FA-0921-464F-AAE1-844C04324D75}" type="datetimeFigureOut">
               <a:rPr lang="zh-CN" altLang="en-US" smtClean="0"/>
-              <a:t>2026/6/24</a:t>
+              <a:t>2026/6/30</a:t>
             </a:fld>
             <a:endParaRPr lang="zh-CN" altLang="en-US"/>
           </a:p>
@@ -2557,7 +2557,7 @@
           <a:p>
             <a:fld id="{D997B5FA-0921-464F-AAE1-844C04324D75}" type="datetimeFigureOut">
               <a:rPr lang="zh-CN" altLang="en-US" smtClean="0"/>
-              <a:t>2026/6/24</a:t>
+              <a:t>2026/6/30</a:t>
             </a:fld>
             <a:endParaRPr lang="zh-CN" altLang="en-US"/>
           </a:p>
@@ -5299,8 +5299,12 @@
           <a:p>
             <a:pPr algn="ctr"/>
             <a:r>
+              <a:rPr lang="en-US" altLang="zh-CN" sz="1400"/>
+              <a:t>Analysis </a:t>
+            </a:r>
+            <a:r>
               <a:rPr lang="en-US" altLang="zh-CN" sz="1400" dirty="0"/>
-              <a:t>Analyze Engine</a:t>
+              <a:t>Engine</a:t>
             </a:r>
             <a:endParaRPr lang="zh-CN" altLang="en-US" sz="1400" dirty="0"/>
           </a:p>

--- a/assets/overview.pptx
+++ b/assets/overview.pptx
@@ -252,7 +252,7 @@
           <a:p>
             <a:fld id="{D997B5FA-0921-464F-AAE1-844C04324D75}" type="datetimeFigureOut">
               <a:rPr lang="zh-CN" altLang="en-US" smtClean="0"/>
-              <a:t>2026/6/30</a:t>
+              <a:t>2026/7/1</a:t>
             </a:fld>
             <a:endParaRPr lang="zh-CN" altLang="en-US"/>
           </a:p>
@@ -420,7 +420,7 @@
           <a:p>
             <a:fld id="{D997B5FA-0921-464F-AAE1-844C04324D75}" type="datetimeFigureOut">
               <a:rPr lang="zh-CN" altLang="en-US" smtClean="0"/>
-              <a:t>2026/6/30</a:t>
+              <a:t>2026/7/1</a:t>
             </a:fld>
             <a:endParaRPr lang="zh-CN" altLang="en-US"/>
           </a:p>
@@ -598,7 +598,7 @@
           <a:p>
             <a:fld id="{D997B5FA-0921-464F-AAE1-844C04324D75}" type="datetimeFigureOut">
               <a:rPr lang="zh-CN" altLang="en-US" smtClean="0"/>
-              <a:t>2026/6/30</a:t>
+              <a:t>2026/7/1</a:t>
             </a:fld>
             <a:endParaRPr lang="zh-CN" altLang="en-US"/>
           </a:p>
@@ -766,7 +766,7 @@
           <a:p>
             <a:fld id="{D997B5FA-0921-464F-AAE1-844C04324D75}" type="datetimeFigureOut">
               <a:rPr lang="zh-CN" altLang="en-US" smtClean="0"/>
-              <a:t>2026/6/30</a:t>
+              <a:t>2026/7/1</a:t>
             </a:fld>
             <a:endParaRPr lang="zh-CN" altLang="en-US"/>
           </a:p>
@@ -1011,7 +1011,7 @@
           <a:p>
             <a:fld id="{D997B5FA-0921-464F-AAE1-844C04324D75}" type="datetimeFigureOut">
               <a:rPr lang="zh-CN" altLang="en-US" smtClean="0"/>
-              <a:t>2026/6/30</a:t>
+              <a:t>2026/7/1</a:t>
             </a:fld>
             <a:endParaRPr lang="zh-CN" altLang="en-US"/>
           </a:p>
@@ -1240,7 +1240,7 @@
           <a:p>
             <a:fld id="{D997B5FA-0921-464F-AAE1-844C04324D75}" type="datetimeFigureOut">
               <a:rPr lang="zh-CN" altLang="en-US" smtClean="0"/>
-              <a:t>2026/6/30</a:t>
+              <a:t>2026/7/1</a:t>
             </a:fld>
             <a:endParaRPr lang="zh-CN" altLang="en-US"/>
           </a:p>
@@ -1604,7 +1604,7 @@
           <a:p>
             <a:fld id="{D997B5FA-0921-464F-AAE1-844C04324D75}" type="datetimeFigureOut">
               <a:rPr lang="zh-CN" altLang="en-US" smtClean="0"/>
-              <a:t>2026/6/30</a:t>
+              <a:t>2026/7/1</a:t>
             </a:fld>
             <a:endParaRPr lang="zh-CN" altLang="en-US"/>
           </a:p>
@@ -1721,7 +1721,7 @@
           <a:p>
             <a:fld id="{D997B5FA-0921-464F-AAE1-844C04324D75}" type="datetimeFigureOut">
               <a:rPr lang="zh-CN" altLang="en-US" smtClean="0"/>
-              <a:t>2026/6/30</a:t>
+              <a:t>2026/7/1</a:t>
             </a:fld>
             <a:endParaRPr lang="zh-CN" altLang="en-US"/>
           </a:p>
@@ -1816,7 +1816,7 @@
           <a:p>
             <a:fld id="{D997B5FA-0921-464F-AAE1-844C04324D75}" type="datetimeFigureOut">
               <a:rPr lang="zh-CN" altLang="en-US" smtClean="0"/>
-              <a:t>2026/6/30</a:t>
+              <a:t>2026/7/1</a:t>
             </a:fld>
             <a:endParaRPr lang="zh-CN" altLang="en-US"/>
           </a:p>
@@ -2091,7 +2091,7 @@
           <a:p>
             <a:fld id="{D997B5FA-0921-464F-AAE1-844C04324D75}" type="datetimeFigureOut">
               <a:rPr lang="zh-CN" altLang="en-US" smtClean="0"/>
-              <a:t>2026/6/30</a:t>
+              <a:t>2026/7/1</a:t>
             </a:fld>
             <a:endParaRPr lang="zh-CN" altLang="en-US"/>
           </a:p>
@@ -2346,7 +2346,7 @@
           <a:p>
             <a:fld id="{D997B5FA-0921-464F-AAE1-844C04324D75}" type="datetimeFigureOut">
               <a:rPr lang="zh-CN" altLang="en-US" smtClean="0"/>
-              <a:t>2026/6/30</a:t>
+              <a:t>2026/7/1</a:t>
             </a:fld>
             <a:endParaRPr lang="zh-CN" altLang="en-US"/>
           </a:p>
@@ -2557,7 +2557,7 @@
           <a:p>
             <a:fld id="{D997B5FA-0921-464F-AAE1-844C04324D75}" type="datetimeFigureOut">
               <a:rPr lang="zh-CN" altLang="en-US" smtClean="0"/>
-              <a:t>2026/6/30</a:t>
+              <a:t>2026/7/1</a:t>
             </a:fld>
             <a:endParaRPr lang="zh-CN" altLang="en-US"/>
           </a:p>
@@ -4607,7 +4607,7 @@
         <p:spPr>
           <a:xfrm>
             <a:off x="6401067" y="595962"/>
-            <a:ext cx="2045213" cy="352936"/>
+            <a:ext cx="2136226" cy="352936"/>
           </a:xfrm>
           <a:prstGeom prst="bentConnector2">
             <a:avLst/>
@@ -4644,8 +4644,8 @@
         </p:nvSpPr>
         <p:spPr>
           <a:xfrm>
-            <a:off x="7750715" y="948898"/>
-            <a:ext cx="1391128" cy="275588"/>
+            <a:off x="7750714" y="948898"/>
+            <a:ext cx="1573157" cy="275588"/>
           </a:xfrm>
           <a:prstGeom prst="rect">
             <a:avLst/>
@@ -4660,16 +4660,16 @@
           <a:p>
             <a:pPr algn="ctr"/>
             <a:r>
-              <a:rPr lang="en-US" altLang="zh-CN" sz="1191" dirty="0"/>
+              <a:rPr lang="en-US" altLang="zh-CN" sz="1191"/>
               <a:t>Reflection</a:t>
             </a:r>
             <a:r>
-              <a:rPr lang="zh-CN" altLang="en-US" sz="1191" dirty="0"/>
+              <a:rPr lang="zh-CN" altLang="en-US" sz="1191"/>
               <a:t> </a:t>
             </a:r>
             <a:r>
-              <a:rPr lang="en-US" altLang="zh-CN" sz="1191" dirty="0"/>
-              <a:t>Memory</a:t>
+              <a:rPr lang="en-US" altLang="zh-CN" sz="1191"/>
+              <a:t>Feedback</a:t>
             </a:r>
             <a:endParaRPr lang="zh-CN" altLang="en-US" sz="1191" dirty="0"/>
           </a:p>
